--- a/HW11/8-Позиционирование. Верстка web-страниц блоками (1).pptx
+++ b/HW11/8-Позиционирование. Верстка web-страниц блоками (1).pptx
@@ -10596,7 +10596,7 @@
       </p:grpSpPr>
       <p:pic>
         <p:nvPicPr>
-          <p:cNvPr id="4" name="Рисунок 3" descr="логотип STEP ACADEMY (белый).png"/>
+          <p:cNvPr id="4" name="Рисунок 3" descr=""/>
           <p:cNvPicPr>
             <a:picLocks noChangeAspect="1"/>
           </p:cNvPicPr>
@@ -11819,7 +11819,7 @@
       </p:grpSpPr>
       <p:pic>
         <p:nvPicPr>
-          <p:cNvPr id="14338" name="Picture 2" descr="http://htmlbook.ru/files/images/layout2/3-01.png"/>
+          <p:cNvPr id="14338" name="Picture 2" descr=""/>
           <p:cNvPicPr>
             <a:picLocks noChangeAspect="1" noChangeArrowheads="1"/>
           </p:cNvPicPr>
@@ -12129,7 +12129,7 @@
       </p:grpSpPr>
       <p:pic>
         <p:nvPicPr>
-          <p:cNvPr id="66562" name="Picture 2" descr="http://htmlbook.ru/files/images/layout2/3-06.png"/>
+          <p:cNvPr id="66562" name="Picture 2" descr=""/>
           <p:cNvPicPr>
             <a:picLocks noChangeAspect="1" noChangeArrowheads="1"/>
           </p:cNvPicPr>
@@ -12420,7 +12420,7 @@
       </p:grpSpPr>
       <p:pic>
         <p:nvPicPr>
-          <p:cNvPr id="72706" name="Picture 2" descr="http://htmlbook.ru/files/images/layout2/3-08.png"/>
+          <p:cNvPr id="72706" name="Picture 2" descr=""/>
           <p:cNvPicPr>
             <a:picLocks noChangeAspect="1" noChangeArrowheads="1"/>
           </p:cNvPicPr>

--- a/HW11/8-Позиционирование. Верстка web-страниц блоками (1).pptx
+++ b/HW11/8-Позиционирование. Верстка web-страниц блоками (1).pptx
@@ -10680,7 +10680,7 @@
                   </a:schemeClr>
                 </a:solidFill>
               </a:rPr>
-              <a:t>Зуев Александр</a:t>
+              <a:t/>
             </a:r>
             <a:endParaRPr lang="ru-RU" sz="3600" b="1" i="1" dirty="0">
               <a:ln w="50800"/>
